--- a/docs/img/.github.pptx
+++ b/docs/img/.github.pptx
@@ -10,38 +10,39 @@
   </p:notesMasterIdLst>
   <p:sldIdLst>
     <p:sldId id="289" r:id="rId4"/>
+    <p:sldId id="291" r:id="rId6"/>
   </p:sldIdLst>
   <p:sldSz cx="9144000" cy="5143500" type="screen16x9"/>
   <p:notesSz cx="9144000" cy="5143500"/>
   <p:embeddedFontLst>
     <p:embeddedFont>
       <p:font typeface="Economica" panose="02000506040000020004"/>
-      <p:regular r:id="rId9"/>
+      <p:regular r:id="rId10"/>
     </p:embeddedFont>
     <p:embeddedFont>
       <p:font typeface="Open Sans" panose="020B0606030504020204"/>
-      <p:regular r:id="rId10"/>
+      <p:regular r:id="rId11"/>
     </p:embeddedFont>
     <p:embeddedFont>
       <p:font typeface="Muli Regular"/>
-      <p:regular r:id="rId11"/>
-      <p:italic r:id="rId12"/>
+      <p:regular r:id="rId12"/>
+      <p:italic r:id="rId13"/>
     </p:embeddedFont>
     <p:embeddedFont>
       <p:font typeface="微软雅黑" panose="020B0503020204020204" charset="-122"/>
-      <p:regular r:id="rId13"/>
-      <p:bold r:id="rId14"/>
+      <p:regular r:id="rId14"/>
+      <p:bold r:id="rId15"/>
     </p:embeddedFont>
     <p:embeddedFont>
       <p:font typeface="等线" panose="02010600030101010101" charset="-122"/>
-      <p:regular r:id="rId15"/>
-      <p:bold r:id="rId16"/>
+      <p:regular r:id="rId16"/>
+      <p:bold r:id="rId17"/>
     </p:embeddedFont>
     <p:embeddedFont>
       <p:font typeface="Muli"/>
-      <p:regular r:id="rId17"/>
-      <p:bold r:id="rId18"/>
-      <p:italic r:id="rId19"/>
+      <p:regular r:id="rId18"/>
+      <p:bold r:id="rId19"/>
+      <p:italic r:id="rId20"/>
     </p:embeddedFont>
   </p:embeddedFontLst>
   <p:defaultTextStyle>
@@ -281,7 +282,7 @@
             <a:srgbClr val="A4A3A4"/>
           </p15:clr>
         </p15:guide>
-        <p15:guide id="2" pos="2069" userDrawn="1">
+        <p15:guide id="2" pos="2080" userDrawn="1">
           <p15:clr>
             <a:srgbClr val="A4A3A4"/>
           </p15:clr>
@@ -1066,6 +1067,127 @@
             <a:tailEnd type="none" w="sm" len="sm"/>
           </a:ln>
         </p:spPr>
+      </p:sp>
+    </p:spTree>
+  </p:cSld>
+  <p:clrMapOvr>
+    <a:masterClrMapping/>
+  </p:clrMapOvr>
+</p:notes>
+</file>
+
+<file path=ppt/notesSlides/notesSlide2.xml><?xml version="1.0" encoding="utf-8"?>
+<p:notes xmlns:a="http://schemas.openxmlformats.org/drawingml/2006/main" xmlns:r="http://schemas.openxmlformats.org/officeDocument/2006/relationships" xmlns:p="http://schemas.openxmlformats.org/presentationml/2006/main">
+  <p:cSld>
+    <p:spTree>
+      <p:nvGrpSpPr>
+        <p:cNvPr id="1" name=""/>
+        <p:cNvGrpSpPr/>
+        <p:nvPr/>
+      </p:nvGrpSpPr>
+      <p:grpSpPr>
+        <a:xfrm>
+          <a:off x="0" y="0"/>
+          <a:ext cx="0" cy="0"/>
+          <a:chOff x="0" y="0"/>
+          <a:chExt cx="0" cy="0"/>
+        </a:xfrm>
+      </p:grpSpPr>
+      <p:sp>
+        <p:nvSpPr>
+          <p:cNvPr id="2" name="幻灯片图像占位符 1"/>
+          <p:cNvSpPr>
+            <a:spLocks noGrp="1" noRot="1" noChangeAspect="1"/>
+          </p:cNvSpPr>
+          <p:nvPr>
+            <p:ph type="sldImg"/>
+          </p:nvPr>
+        </p:nvSpPr>
+        <p:spPr/>
+      </p:sp>
+      <p:sp>
+        <p:nvSpPr>
+          <p:cNvPr id="3" name="备注占位符 2"/>
+          <p:cNvSpPr>
+            <a:spLocks noGrp="1"/>
+          </p:cNvSpPr>
+          <p:nvPr>
+            <p:ph type="body" idx="1"/>
+          </p:nvPr>
+        </p:nvSpPr>
+        <p:spPr/>
+        <p:txBody>
+          <a:bodyPr/>
+          <a:lstStyle/>
+          <a:p>
+            <a:pPr marL="158750" indent="0">
+              <a:buNone/>
+            </a:pPr>
+            <a:r>
+              <a:rPr lang="en-US" altLang="zh-CN"/>
+              <a:t>architecture.png</a:t>
+            </a:r>
+            <a:endParaRPr lang="en-US" altLang="zh-CN"/>
+          </a:p>
+          <a:p>
+            <a:pPr marL="158750" indent="0">
+              <a:buNone/>
+            </a:pPr>
+            <a:r>
+              <a:rPr lang="zh-CN" altLang="en-US"/>
+              <a:t>组织架构：</a:t>
+            </a:r>
+            <a:r>
+              <a:rPr lang="en-US" altLang="zh-CN">
+                <a:hlinkClick r:id="rId3" action="ppaction://hlinkfile"/>
+              </a:rPr>
+              <a:t>https://www.openubmc.cn/zh/organizations#org-structure</a:t>
+            </a:r>
+            <a:endParaRPr lang="en-US" altLang="zh-CN">
+              <a:hlinkClick r:id="rId3" action="ppaction://hlinkfile"/>
+            </a:endParaRPr>
+          </a:p>
+          <a:p>
+            <a:pPr marL="158750" indent="0">
+              <a:buNone/>
+            </a:pPr>
+            <a:r>
+              <a:rPr lang="en-US" altLang="zh-CN">
+                <a:hlinkClick r:id="rId3" action="ppaction://hlinkfile"/>
+              </a:rPr>
+              <a:t>https://kaiyuanshe.github.io/profile/structure/</a:t>
+            </a:r>
+            <a:endParaRPr lang="en-US" altLang="zh-CN"/>
+          </a:p>
+          <a:p>
+            <a:pPr marL="158750" indent="0">
+              <a:buNone/>
+            </a:pPr>
+            <a:endParaRPr lang="en-US" altLang="zh-CN"/>
+          </a:p>
+        </p:txBody>
+      </p:sp>
+      <p:sp>
+        <p:nvSpPr>
+          <p:cNvPr id="4" name="灯片编号占位符 3"/>
+          <p:cNvSpPr>
+            <a:spLocks noGrp="1"/>
+          </p:cNvSpPr>
+          <p:nvPr>
+            <p:ph type="sldNum" sz="quarter" idx="10"/>
+          </p:nvPr>
+        </p:nvSpPr>
+        <p:spPr/>
+        <p:txBody>
+          <a:bodyPr/>
+          <a:lstStyle/>
+          <a:p>
+            <a:fld id="{9C005385-2535-4385-8ABF-878A66ACA1E5}" type="slidenum">
+              <a:rPr lang="zh-CN" altLang="en-US" smtClean="0"/>
+            </a:fld>
+            <a:endParaRPr lang="zh-CN" altLang="en-US"/>
+          </a:p>
+        </p:txBody>
       </p:sp>
     </p:spTree>
   </p:cSld>
@@ -12424,6 +12546,2032 @@
 </p:sld>
 </file>
 
+<file path=ppt/slides/slide2.xml><?xml version="1.0" encoding="utf-8"?>
+<p:sld xmlns:a="http://schemas.openxmlformats.org/drawingml/2006/main" xmlns:r="http://schemas.openxmlformats.org/officeDocument/2006/relationships" xmlns:p="http://schemas.openxmlformats.org/presentationml/2006/main">
+  <p:cSld>
+    <p:spTree>
+      <p:nvGrpSpPr>
+        <p:cNvPr id="1" name=""/>
+        <p:cNvGrpSpPr/>
+        <p:nvPr/>
+      </p:nvGrpSpPr>
+      <p:grpSpPr>
+        <a:xfrm>
+          <a:off x="0" y="0"/>
+          <a:ext cx="0" cy="0"/>
+          <a:chOff x="0" y="0"/>
+          <a:chExt cx="0" cy="0"/>
+        </a:xfrm>
+      </p:grpSpPr>
+      <p:sp>
+        <p:nvSpPr>
+          <p:cNvPr id="189" name="圆角矩形 188"/>
+          <p:cNvSpPr/>
+          <p:nvPr/>
+        </p:nvSpPr>
+        <p:spPr>
+          <a:xfrm>
+            <a:off x="3947160" y="1550035"/>
+            <a:ext cx="941070" cy="589280"/>
+          </a:xfrm>
+          <a:prstGeom prst="roundRect">
+            <a:avLst/>
+          </a:prstGeom>
+          <a:solidFill>
+            <a:srgbClr val="DAF5D5"/>
+          </a:solidFill>
+          <a:ln w="25400">
+            <a:solidFill>
+              <a:srgbClr val="62D256"/>
+            </a:solidFill>
+          </a:ln>
+        </p:spPr>
+        <p:style>
+          <a:lnRef idx="0">
+            <a:srgbClr val="FFFFFF"/>
+          </a:lnRef>
+          <a:fillRef idx="1">
+            <a:schemeClr val="accent5"/>
+          </a:fillRef>
+          <a:effectRef idx="0">
+            <a:srgbClr val="FFFFFF"/>
+          </a:effectRef>
+          <a:fontRef idx="minor">
+            <a:schemeClr val="dk1"/>
+          </a:fontRef>
+        </p:style>
+        <p:txBody>
+          <a:bodyPr rtlCol="0" anchor="ctr"/>
+          <a:p>
+            <a:pPr algn="ctr"/>
+            <a:r>
+              <a:rPr lang="zh-CN" altLang="en-US" sz="2200" b="1">
+                <a:latin typeface="微软雅黑" panose="020B0503020204020204" charset="-122"/>
+                <a:ea typeface="微软雅黑" panose="020B0503020204020204" charset="-122"/>
+              </a:rPr>
+              <a:t>技术</a:t>
+            </a:r>
+            <a:endParaRPr lang="zh-CN" altLang="en-US" sz="2200" b="1">
+              <a:latin typeface="微软雅黑" panose="020B0503020204020204" charset="-122"/>
+              <a:ea typeface="微软雅黑" panose="020B0503020204020204" charset="-122"/>
+            </a:endParaRPr>
+          </a:p>
+        </p:txBody>
+      </p:sp>
+      <p:sp>
+        <p:nvSpPr>
+          <p:cNvPr id="190" name="圆角矩形 189"/>
+          <p:cNvSpPr/>
+          <p:nvPr/>
+        </p:nvSpPr>
+        <p:spPr>
+          <a:xfrm>
+            <a:off x="7979410" y="2336165"/>
+            <a:ext cx="1040130" cy="368300"/>
+          </a:xfrm>
+          <a:prstGeom prst="roundRect">
+            <a:avLst/>
+          </a:prstGeom>
+          <a:solidFill>
+            <a:srgbClr val="A1B8E0"/>
+          </a:solidFill>
+        </p:spPr>
+        <p:style>
+          <a:lnRef idx="0">
+            <a:srgbClr val="FFFFFF"/>
+          </a:lnRef>
+          <a:fillRef idx="1">
+            <a:schemeClr val="accent5"/>
+          </a:fillRef>
+          <a:effectRef idx="0">
+            <a:srgbClr val="FFFFFF"/>
+          </a:effectRef>
+          <a:fontRef idx="minor">
+            <a:schemeClr val="dk1"/>
+          </a:fontRef>
+        </p:style>
+        <p:txBody>
+          <a:bodyPr rtlCol="0" anchor="ctr"/>
+          <a:p>
+            <a:pPr algn="ctr"/>
+            <a:r>
+              <a:rPr lang="zh-CN" altLang="en-US" sz="1200" b="1">
+                <a:latin typeface="微软雅黑" panose="020B0503020204020204" charset="-122"/>
+                <a:ea typeface="微软雅黑" panose="020B0503020204020204" charset="-122"/>
+              </a:rPr>
+              <a:t>安全合规</a:t>
+            </a:r>
+            <a:endParaRPr lang="zh-CN" altLang="en-US" sz="1200" b="1">
+              <a:latin typeface="微软雅黑" panose="020B0503020204020204" charset="-122"/>
+              <a:ea typeface="微软雅黑" panose="020B0503020204020204" charset="-122"/>
+            </a:endParaRPr>
+          </a:p>
+        </p:txBody>
+      </p:sp>
+      <p:sp>
+        <p:nvSpPr>
+          <p:cNvPr id="191" name="圆角矩形 190"/>
+          <p:cNvSpPr/>
+          <p:nvPr/>
+        </p:nvSpPr>
+        <p:spPr>
+          <a:xfrm>
+            <a:off x="7979410" y="2851150"/>
+            <a:ext cx="1039495" cy="329565"/>
+          </a:xfrm>
+          <a:prstGeom prst="roundRect">
+            <a:avLst/>
+          </a:prstGeom>
+          <a:solidFill>
+            <a:srgbClr val="A1B8E0"/>
+          </a:solidFill>
+        </p:spPr>
+        <p:style>
+          <a:lnRef idx="0">
+            <a:srgbClr val="FFFFFF"/>
+          </a:lnRef>
+          <a:fillRef idx="1">
+            <a:schemeClr val="accent5"/>
+          </a:fillRef>
+          <a:effectRef idx="0">
+            <a:srgbClr val="FFFFFF"/>
+          </a:effectRef>
+          <a:fontRef idx="minor">
+            <a:schemeClr val="dk1"/>
+          </a:fontRef>
+        </p:style>
+        <p:txBody>
+          <a:bodyPr rtlCol="0" anchor="ctr"/>
+          <a:p>
+            <a:pPr algn="ctr"/>
+            <a:r>
+              <a:rPr lang="zh-CN" altLang="en-US" sz="1200" b="1">
+                <a:latin typeface="微软雅黑" panose="020B0503020204020204" charset="-122"/>
+                <a:ea typeface="微软雅黑" panose="020B0503020204020204" charset="-122"/>
+              </a:rPr>
+              <a:t>风险承受</a:t>
+            </a:r>
+            <a:endParaRPr lang="zh-CN" altLang="en-US" sz="1200" b="1">
+              <a:latin typeface="微软雅黑" panose="020B0503020204020204" charset="-122"/>
+              <a:ea typeface="微软雅黑" panose="020B0503020204020204" charset="-122"/>
+            </a:endParaRPr>
+          </a:p>
+        </p:txBody>
+      </p:sp>
+      <p:sp>
+        <p:nvSpPr>
+          <p:cNvPr id="192" name="圆角矩形 191"/>
+          <p:cNvSpPr/>
+          <p:nvPr/>
+        </p:nvSpPr>
+        <p:spPr>
+          <a:xfrm>
+            <a:off x="7979410" y="3327400"/>
+            <a:ext cx="1039495" cy="363220"/>
+          </a:xfrm>
+          <a:prstGeom prst="roundRect">
+            <a:avLst/>
+          </a:prstGeom>
+          <a:solidFill>
+            <a:srgbClr val="A1B8E0"/>
+          </a:solidFill>
+        </p:spPr>
+        <p:style>
+          <a:lnRef idx="0">
+            <a:srgbClr val="FFFFFF"/>
+          </a:lnRef>
+          <a:fillRef idx="1">
+            <a:schemeClr val="accent5"/>
+          </a:fillRef>
+          <a:effectRef idx="0">
+            <a:srgbClr val="FFFFFF"/>
+          </a:effectRef>
+          <a:fontRef idx="minor">
+            <a:schemeClr val="dk1"/>
+          </a:fontRef>
+        </p:style>
+        <p:txBody>
+          <a:bodyPr rtlCol="0" anchor="ctr"/>
+          <a:p>
+            <a:pPr algn="ctr"/>
+            <a:r>
+              <a:rPr lang="zh-CN" altLang="en-US" sz="1200" b="1">
+                <a:latin typeface="微软雅黑" panose="020B0503020204020204" charset="-122"/>
+                <a:ea typeface="微软雅黑" panose="020B0503020204020204" charset="-122"/>
+              </a:rPr>
+              <a:t>授权与发展</a:t>
+            </a:r>
+            <a:endParaRPr lang="zh-CN" altLang="en-US" sz="1200" b="1">
+              <a:latin typeface="微软雅黑" panose="020B0503020204020204" charset="-122"/>
+              <a:ea typeface="微软雅黑" panose="020B0503020204020204" charset="-122"/>
+            </a:endParaRPr>
+          </a:p>
+        </p:txBody>
+      </p:sp>
+      <p:sp>
+        <p:nvSpPr>
+          <p:cNvPr id="193" name="圆角矩形 192"/>
+          <p:cNvSpPr/>
+          <p:nvPr/>
+        </p:nvSpPr>
+        <p:spPr>
+          <a:xfrm>
+            <a:off x="2508250" y="2322830"/>
+            <a:ext cx="1058545" cy="377825"/>
+          </a:xfrm>
+          <a:prstGeom prst="roundRect">
+            <a:avLst/>
+          </a:prstGeom>
+          <a:solidFill>
+            <a:srgbClr val="A1B8E0"/>
+          </a:solidFill>
+        </p:spPr>
+        <p:style>
+          <a:lnRef idx="0">
+            <a:srgbClr val="FFFFFF"/>
+          </a:lnRef>
+          <a:fillRef idx="1">
+            <a:schemeClr val="accent5"/>
+          </a:fillRef>
+          <a:effectRef idx="0">
+            <a:srgbClr val="FFFFFF"/>
+          </a:effectRef>
+          <a:fontRef idx="minor">
+            <a:schemeClr val="dk1"/>
+          </a:fontRef>
+        </p:style>
+        <p:txBody>
+          <a:bodyPr rtlCol="0" anchor="ctr"/>
+          <a:p>
+            <a:pPr algn="ctr"/>
+            <a:r>
+              <a:rPr lang="zh-CN" altLang="en-US" sz="1200" b="1">
+                <a:latin typeface="微软雅黑" panose="020B0503020204020204" charset="-122"/>
+                <a:ea typeface="微软雅黑" panose="020B0503020204020204" charset="-122"/>
+              </a:rPr>
+              <a:t>硬件采购</a:t>
+            </a:r>
+            <a:endParaRPr lang="zh-CN" altLang="en-US" sz="1200" b="1">
+              <a:latin typeface="微软雅黑" panose="020B0503020204020204" charset="-122"/>
+              <a:ea typeface="微软雅黑" panose="020B0503020204020204" charset="-122"/>
+            </a:endParaRPr>
+          </a:p>
+        </p:txBody>
+      </p:sp>
+      <p:sp>
+        <p:nvSpPr>
+          <p:cNvPr id="195" name="圆角矩形 194"/>
+          <p:cNvSpPr/>
+          <p:nvPr/>
+        </p:nvSpPr>
+        <p:spPr>
+          <a:xfrm>
+            <a:off x="3462655" y="408305"/>
+            <a:ext cx="1910080" cy="567055"/>
+          </a:xfrm>
+          <a:prstGeom prst="roundRect">
+            <a:avLst/>
+          </a:prstGeom>
+          <a:blipFill>
+            <a:blip r:embed="rId1"/>
+            <a:tile tx="0" ty="0" sx="100000" sy="100000" flip="none" algn="tl"/>
+          </a:blipFill>
+        </p:spPr>
+        <p:style>
+          <a:lnRef idx="0">
+            <a:srgbClr val="FFFFFF"/>
+          </a:lnRef>
+          <a:fillRef idx="1">
+            <a:schemeClr val="accent5"/>
+          </a:fillRef>
+          <a:effectRef idx="0">
+            <a:srgbClr val="FFFFFF"/>
+          </a:effectRef>
+          <a:fontRef idx="minor">
+            <a:schemeClr val="dk1"/>
+          </a:fontRef>
+        </p:style>
+        <p:txBody>
+          <a:bodyPr rtlCol="0" anchor="ctr"/>
+          <a:p>
+            <a:pPr algn="ctr"/>
+            <a:r>
+              <a:rPr lang="zh-CN" altLang="en-US" sz="2400" b="1">
+                <a:solidFill>
+                  <a:schemeClr val="bg1"/>
+                </a:solidFill>
+                <a:latin typeface="微软雅黑" panose="020B0503020204020204" charset="-122"/>
+                <a:ea typeface="微软雅黑" panose="020B0503020204020204" charset="-122"/>
+              </a:rPr>
+              <a:t>开源孪创</a:t>
+            </a:r>
+            <a:endParaRPr lang="zh-CN" altLang="en-US" sz="2400" b="1">
+              <a:solidFill>
+                <a:schemeClr val="bg1"/>
+              </a:solidFill>
+              <a:latin typeface="微软雅黑" panose="020B0503020204020204" charset="-122"/>
+              <a:ea typeface="微软雅黑" panose="020B0503020204020204" charset="-122"/>
+            </a:endParaRPr>
+          </a:p>
+        </p:txBody>
+      </p:sp>
+      <p:sp>
+        <p:nvSpPr>
+          <p:cNvPr id="196" name="圆角矩形 195"/>
+          <p:cNvSpPr/>
+          <p:nvPr/>
+        </p:nvSpPr>
+        <p:spPr>
+          <a:xfrm>
+            <a:off x="6635750" y="2336165"/>
+            <a:ext cx="1039495" cy="368300"/>
+          </a:xfrm>
+          <a:prstGeom prst="roundRect">
+            <a:avLst/>
+          </a:prstGeom>
+          <a:solidFill>
+            <a:srgbClr val="A1B8E0"/>
+          </a:solidFill>
+        </p:spPr>
+        <p:style>
+          <a:lnRef idx="0">
+            <a:srgbClr val="FFFFFF"/>
+          </a:lnRef>
+          <a:fillRef idx="1">
+            <a:schemeClr val="accent5"/>
+          </a:fillRef>
+          <a:effectRef idx="0">
+            <a:srgbClr val="FFFFFF"/>
+          </a:effectRef>
+          <a:fontRef idx="minor">
+            <a:schemeClr val="dk1"/>
+          </a:fontRef>
+        </p:style>
+        <p:txBody>
+          <a:bodyPr rtlCol="0" anchor="ctr"/>
+          <a:p>
+            <a:pPr algn="ctr"/>
+            <a:r>
+              <a:rPr lang="zh-CN" altLang="en-US" sz="1200" b="1">
+                <a:latin typeface="微软雅黑" panose="020B0503020204020204" charset="-122"/>
+                <a:ea typeface="微软雅黑" panose="020B0503020204020204" charset="-122"/>
+              </a:rPr>
+              <a:t>开源教育</a:t>
+            </a:r>
+            <a:endParaRPr lang="zh-CN" altLang="en-US" sz="1200" b="1">
+              <a:latin typeface="微软雅黑" panose="020B0503020204020204" charset="-122"/>
+              <a:ea typeface="微软雅黑" panose="020B0503020204020204" charset="-122"/>
+            </a:endParaRPr>
+          </a:p>
+        </p:txBody>
+      </p:sp>
+      <p:sp>
+        <p:nvSpPr>
+          <p:cNvPr id="197" name="圆角矩形 196"/>
+          <p:cNvSpPr/>
+          <p:nvPr/>
+        </p:nvSpPr>
+        <p:spPr>
+          <a:xfrm>
+            <a:off x="6636385" y="2874645"/>
+            <a:ext cx="1039495" cy="329565"/>
+          </a:xfrm>
+          <a:prstGeom prst="roundRect">
+            <a:avLst/>
+          </a:prstGeom>
+          <a:solidFill>
+            <a:srgbClr val="A1B8E0"/>
+          </a:solidFill>
+        </p:spPr>
+        <p:style>
+          <a:lnRef idx="0">
+            <a:srgbClr val="FFFFFF"/>
+          </a:lnRef>
+          <a:fillRef idx="1">
+            <a:schemeClr val="accent5"/>
+          </a:fillRef>
+          <a:effectRef idx="0">
+            <a:srgbClr val="FFFFFF"/>
+          </a:effectRef>
+          <a:fontRef idx="minor">
+            <a:schemeClr val="dk1"/>
+          </a:fontRef>
+        </p:style>
+        <p:txBody>
+          <a:bodyPr rtlCol="0" anchor="ctr"/>
+          <a:p>
+            <a:pPr algn="ctr"/>
+            <a:r>
+              <a:rPr lang="zh-CN" altLang="en-US" sz="1200" b="1">
+                <a:latin typeface="微软雅黑" panose="020B0503020204020204" charset="-122"/>
+                <a:ea typeface="微软雅黑" panose="020B0503020204020204" charset="-122"/>
+              </a:rPr>
+              <a:t>应用分发</a:t>
+            </a:r>
+            <a:endParaRPr lang="zh-CN" altLang="en-US" sz="1200" b="1">
+              <a:latin typeface="微软雅黑" panose="020B0503020204020204" charset="-122"/>
+              <a:ea typeface="微软雅黑" panose="020B0503020204020204" charset="-122"/>
+            </a:endParaRPr>
+          </a:p>
+        </p:txBody>
+      </p:sp>
+      <p:sp>
+        <p:nvSpPr>
+          <p:cNvPr id="198" name="圆角矩形 197"/>
+          <p:cNvSpPr/>
+          <p:nvPr/>
+        </p:nvSpPr>
+        <p:spPr>
+          <a:xfrm>
+            <a:off x="6666230" y="3343275"/>
+            <a:ext cx="1038860" cy="340360"/>
+          </a:xfrm>
+          <a:prstGeom prst="roundRect">
+            <a:avLst/>
+          </a:prstGeom>
+          <a:solidFill>
+            <a:srgbClr val="A1B8E0"/>
+          </a:solidFill>
+        </p:spPr>
+        <p:style>
+          <a:lnRef idx="0">
+            <a:srgbClr val="FFFFFF"/>
+          </a:lnRef>
+          <a:fillRef idx="1">
+            <a:schemeClr val="accent5"/>
+          </a:fillRef>
+          <a:effectRef idx="0">
+            <a:srgbClr val="FFFFFF"/>
+          </a:effectRef>
+          <a:fontRef idx="minor">
+            <a:schemeClr val="dk1"/>
+          </a:fontRef>
+        </p:style>
+        <p:txBody>
+          <a:bodyPr rtlCol="0" anchor="ctr"/>
+          <a:p>
+            <a:pPr algn="ctr"/>
+            <a:r>
+              <a:rPr lang="zh-CN" altLang="en-US" sz="1200" b="1">
+                <a:latin typeface="微软雅黑" panose="020B0503020204020204" charset="-122"/>
+                <a:ea typeface="微软雅黑" panose="020B0503020204020204" charset="-122"/>
+              </a:rPr>
+              <a:t>活动宣传</a:t>
+            </a:r>
+            <a:endParaRPr lang="zh-CN" altLang="en-US" sz="1200" b="1">
+              <a:latin typeface="微软雅黑" panose="020B0503020204020204" charset="-122"/>
+              <a:ea typeface="微软雅黑" panose="020B0503020204020204" charset="-122"/>
+            </a:endParaRPr>
+          </a:p>
+        </p:txBody>
+      </p:sp>
+      <p:sp>
+        <p:nvSpPr>
+          <p:cNvPr id="199" name="圆角矩形 198"/>
+          <p:cNvSpPr/>
+          <p:nvPr/>
+        </p:nvSpPr>
+        <p:spPr>
+          <a:xfrm>
+            <a:off x="6666230" y="3784600"/>
+            <a:ext cx="1069340" cy="338455"/>
+          </a:xfrm>
+          <a:prstGeom prst="roundRect">
+            <a:avLst/>
+          </a:prstGeom>
+          <a:solidFill>
+            <a:srgbClr val="A1B8E0"/>
+          </a:solidFill>
+        </p:spPr>
+        <p:style>
+          <a:lnRef idx="0">
+            <a:srgbClr val="FFFFFF"/>
+          </a:lnRef>
+          <a:fillRef idx="1">
+            <a:schemeClr val="accent5"/>
+          </a:fillRef>
+          <a:effectRef idx="0">
+            <a:srgbClr val="FFFFFF"/>
+          </a:effectRef>
+          <a:fontRef idx="minor">
+            <a:schemeClr val="dk1"/>
+          </a:fontRef>
+        </p:style>
+        <p:txBody>
+          <a:bodyPr rtlCol="0" anchor="ctr"/>
+          <a:p>
+            <a:pPr algn="ctr"/>
+            <a:r>
+              <a:rPr lang="zh-CN" altLang="en-US" sz="1200" b="1">
+                <a:latin typeface="微软雅黑" panose="020B0503020204020204" charset="-122"/>
+                <a:ea typeface="微软雅黑" panose="020B0503020204020204" charset="-122"/>
+              </a:rPr>
+              <a:t>外部通讯</a:t>
+            </a:r>
+            <a:endParaRPr lang="zh-CN" altLang="en-US" sz="1200" b="1">
+              <a:latin typeface="微软雅黑" panose="020B0503020204020204" charset="-122"/>
+              <a:ea typeface="微软雅黑" panose="020B0503020204020204" charset="-122"/>
+            </a:endParaRPr>
+          </a:p>
+        </p:txBody>
+      </p:sp>
+      <p:sp>
+        <p:nvSpPr>
+          <p:cNvPr id="200" name="圆角矩形 199"/>
+          <p:cNvSpPr/>
+          <p:nvPr/>
+        </p:nvSpPr>
+        <p:spPr>
+          <a:xfrm>
+            <a:off x="132080" y="1558290"/>
+            <a:ext cx="987425" cy="589280"/>
+          </a:xfrm>
+          <a:prstGeom prst="roundRect">
+            <a:avLst/>
+          </a:prstGeom>
+          <a:solidFill>
+            <a:srgbClr val="DAF5D5"/>
+          </a:solidFill>
+          <a:ln w="25400">
+            <a:solidFill>
+              <a:srgbClr val="62D256"/>
+            </a:solidFill>
+          </a:ln>
+        </p:spPr>
+        <p:style>
+          <a:lnRef idx="0">
+            <a:srgbClr val="FFFFFF"/>
+          </a:lnRef>
+          <a:fillRef idx="1">
+            <a:schemeClr val="accent5"/>
+          </a:fillRef>
+          <a:effectRef idx="0">
+            <a:srgbClr val="FFFFFF"/>
+          </a:effectRef>
+          <a:fontRef idx="minor">
+            <a:schemeClr val="dk1"/>
+          </a:fontRef>
+        </p:style>
+        <p:txBody>
+          <a:bodyPr rtlCol="0" anchor="ctr"/>
+          <a:p>
+            <a:pPr algn="ctr"/>
+            <a:r>
+              <a:rPr lang="zh-CN" altLang="en-US" sz="2200" b="1">
+                <a:latin typeface="微软雅黑" panose="020B0503020204020204" charset="-122"/>
+                <a:ea typeface="微软雅黑" panose="020B0503020204020204" charset="-122"/>
+              </a:rPr>
+              <a:t>人事</a:t>
+            </a:r>
+            <a:endParaRPr lang="zh-CN" altLang="en-US" sz="2200" b="1">
+              <a:latin typeface="微软雅黑" panose="020B0503020204020204" charset="-122"/>
+              <a:ea typeface="微软雅黑" panose="020B0503020204020204" charset="-122"/>
+            </a:endParaRPr>
+          </a:p>
+        </p:txBody>
+      </p:sp>
+      <p:sp>
+        <p:nvSpPr>
+          <p:cNvPr id="201" name="圆角矩形 200"/>
+          <p:cNvSpPr/>
+          <p:nvPr/>
+        </p:nvSpPr>
+        <p:spPr>
+          <a:xfrm>
+            <a:off x="1344295" y="1558290"/>
+            <a:ext cx="1029335" cy="589280"/>
+          </a:xfrm>
+          <a:prstGeom prst="roundRect">
+            <a:avLst/>
+          </a:prstGeom>
+          <a:solidFill>
+            <a:srgbClr val="DAF5D5"/>
+          </a:solidFill>
+          <a:ln w="25400">
+            <a:solidFill>
+              <a:srgbClr val="62D256"/>
+            </a:solidFill>
+          </a:ln>
+        </p:spPr>
+        <p:style>
+          <a:lnRef idx="0">
+            <a:srgbClr val="FFFFFF"/>
+          </a:lnRef>
+          <a:fillRef idx="1">
+            <a:schemeClr val="accent5"/>
+          </a:fillRef>
+          <a:effectRef idx="0">
+            <a:srgbClr val="FFFFFF"/>
+          </a:effectRef>
+          <a:fontRef idx="minor">
+            <a:schemeClr val="dk1"/>
+          </a:fontRef>
+        </p:style>
+        <p:txBody>
+          <a:bodyPr rtlCol="0" anchor="ctr"/>
+          <a:p>
+            <a:pPr algn="ctr"/>
+            <a:r>
+              <a:rPr lang="zh-CN" altLang="en-US" sz="2200" b="1">
+                <a:latin typeface="微软雅黑" panose="020B0503020204020204" charset="-122"/>
+                <a:ea typeface="微软雅黑" panose="020B0503020204020204" charset="-122"/>
+              </a:rPr>
+              <a:t>财务</a:t>
+            </a:r>
+            <a:endParaRPr lang="zh-CN" altLang="en-US" sz="2200" b="1">
+              <a:latin typeface="微软雅黑" panose="020B0503020204020204" charset="-122"/>
+              <a:ea typeface="微软雅黑" panose="020B0503020204020204" charset="-122"/>
+            </a:endParaRPr>
+          </a:p>
+        </p:txBody>
+      </p:sp>
+      <p:sp>
+        <p:nvSpPr>
+          <p:cNvPr id="202" name="圆角矩形 201"/>
+          <p:cNvSpPr/>
+          <p:nvPr/>
+        </p:nvSpPr>
+        <p:spPr>
+          <a:xfrm>
+            <a:off x="2508250" y="1584960"/>
+            <a:ext cx="1058545" cy="589280"/>
+          </a:xfrm>
+          <a:prstGeom prst="roundRect">
+            <a:avLst/>
+          </a:prstGeom>
+          <a:solidFill>
+            <a:srgbClr val="DAF5D5"/>
+          </a:solidFill>
+          <a:ln w="25400">
+            <a:solidFill>
+              <a:srgbClr val="62D256"/>
+            </a:solidFill>
+          </a:ln>
+        </p:spPr>
+        <p:style>
+          <a:lnRef idx="0">
+            <a:srgbClr val="FFFFFF"/>
+          </a:lnRef>
+          <a:fillRef idx="1">
+            <a:schemeClr val="accent5"/>
+          </a:fillRef>
+          <a:effectRef idx="0">
+            <a:srgbClr val="FFFFFF"/>
+          </a:effectRef>
+          <a:fontRef idx="minor">
+            <a:schemeClr val="dk1"/>
+          </a:fontRef>
+        </p:style>
+        <p:txBody>
+          <a:bodyPr rtlCol="0" anchor="ctr"/>
+          <a:p>
+            <a:pPr algn="ctr"/>
+            <a:r>
+              <a:rPr lang="zh-CN" altLang="en-US" sz="2200" b="1">
+                <a:latin typeface="微软雅黑" panose="020B0503020204020204" charset="-122"/>
+                <a:ea typeface="微软雅黑" panose="020B0503020204020204" charset="-122"/>
+              </a:rPr>
+              <a:t>行政</a:t>
+            </a:r>
+            <a:endParaRPr lang="zh-CN" altLang="en-US" sz="2200" b="1">
+              <a:latin typeface="微软雅黑" panose="020B0503020204020204" charset="-122"/>
+              <a:ea typeface="微软雅黑" panose="020B0503020204020204" charset="-122"/>
+            </a:endParaRPr>
+          </a:p>
+        </p:txBody>
+      </p:sp>
+      <p:sp>
+        <p:nvSpPr>
+          <p:cNvPr id="203" name="圆角矩形 202"/>
+          <p:cNvSpPr/>
+          <p:nvPr/>
+        </p:nvSpPr>
+        <p:spPr>
+          <a:xfrm>
+            <a:off x="7980045" y="1576705"/>
+            <a:ext cx="1040130" cy="589280"/>
+          </a:xfrm>
+          <a:prstGeom prst="roundRect">
+            <a:avLst/>
+          </a:prstGeom>
+          <a:solidFill>
+            <a:srgbClr val="DAF5D5"/>
+          </a:solidFill>
+          <a:ln w="25400">
+            <a:solidFill>
+              <a:srgbClr val="62D256"/>
+            </a:solidFill>
+          </a:ln>
+        </p:spPr>
+        <p:style>
+          <a:lnRef idx="0">
+            <a:srgbClr val="FFFFFF"/>
+          </a:lnRef>
+          <a:fillRef idx="1">
+            <a:schemeClr val="accent5"/>
+          </a:fillRef>
+          <a:effectRef idx="0">
+            <a:srgbClr val="FFFFFF"/>
+          </a:effectRef>
+          <a:fontRef idx="minor">
+            <a:schemeClr val="dk1"/>
+          </a:fontRef>
+        </p:style>
+        <p:txBody>
+          <a:bodyPr rtlCol="0" anchor="ctr"/>
+          <a:p>
+            <a:pPr algn="ctr"/>
+            <a:r>
+              <a:rPr lang="zh-CN" altLang="en-US" sz="2200" b="1">
+                <a:latin typeface="微软雅黑" panose="020B0503020204020204" charset="-122"/>
+                <a:ea typeface="微软雅黑" panose="020B0503020204020204" charset="-122"/>
+              </a:rPr>
+              <a:t>法务</a:t>
+            </a:r>
+            <a:endParaRPr lang="zh-CN" altLang="en-US" sz="2200" b="1">
+              <a:latin typeface="微软雅黑" panose="020B0503020204020204" charset="-122"/>
+              <a:ea typeface="微软雅黑" panose="020B0503020204020204" charset="-122"/>
+            </a:endParaRPr>
+          </a:p>
+        </p:txBody>
+      </p:sp>
+      <p:sp>
+        <p:nvSpPr>
+          <p:cNvPr id="204" name="圆角矩形 203"/>
+          <p:cNvSpPr/>
+          <p:nvPr/>
+        </p:nvSpPr>
+        <p:spPr>
+          <a:xfrm>
+            <a:off x="6636385" y="1576705"/>
+            <a:ext cx="1040130" cy="589280"/>
+          </a:xfrm>
+          <a:prstGeom prst="roundRect">
+            <a:avLst/>
+          </a:prstGeom>
+          <a:solidFill>
+            <a:srgbClr val="DAF5D5"/>
+          </a:solidFill>
+          <a:ln w="25400">
+            <a:solidFill>
+              <a:srgbClr val="62D256"/>
+            </a:solidFill>
+          </a:ln>
+        </p:spPr>
+        <p:style>
+          <a:lnRef idx="0">
+            <a:srgbClr val="FFFFFF"/>
+          </a:lnRef>
+          <a:fillRef idx="1">
+            <a:schemeClr val="accent5"/>
+          </a:fillRef>
+          <a:effectRef idx="0">
+            <a:srgbClr val="FFFFFF"/>
+          </a:effectRef>
+          <a:fontRef idx="minor">
+            <a:schemeClr val="dk1"/>
+          </a:fontRef>
+        </p:style>
+        <p:txBody>
+          <a:bodyPr rtlCol="0" anchor="ctr"/>
+          <a:p>
+            <a:pPr algn="ctr"/>
+            <a:r>
+              <a:rPr lang="zh-CN" altLang="en-US" sz="2200" b="1">
+                <a:latin typeface="微软雅黑" panose="020B0503020204020204" charset="-122"/>
+                <a:ea typeface="微软雅黑" panose="020B0503020204020204" charset="-122"/>
+              </a:rPr>
+              <a:t>宣传</a:t>
+            </a:r>
+            <a:endParaRPr lang="zh-CN" altLang="en-US" sz="2200" b="1">
+              <a:latin typeface="微软雅黑" panose="020B0503020204020204" charset="-122"/>
+              <a:ea typeface="微软雅黑" panose="020B0503020204020204" charset="-122"/>
+            </a:endParaRPr>
+          </a:p>
+        </p:txBody>
+      </p:sp>
+      <p:sp>
+        <p:nvSpPr>
+          <p:cNvPr id="205" name="圆角矩形 204"/>
+          <p:cNvSpPr/>
+          <p:nvPr/>
+        </p:nvSpPr>
+        <p:spPr>
+          <a:xfrm>
+            <a:off x="5292725" y="1576705"/>
+            <a:ext cx="1040130" cy="589280"/>
+          </a:xfrm>
+          <a:prstGeom prst="roundRect">
+            <a:avLst/>
+          </a:prstGeom>
+          <a:solidFill>
+            <a:srgbClr val="DAF5D5"/>
+          </a:solidFill>
+          <a:ln w="25400">
+            <a:solidFill>
+              <a:srgbClr val="62D256"/>
+            </a:solidFill>
+          </a:ln>
+        </p:spPr>
+        <p:style>
+          <a:lnRef idx="0">
+            <a:srgbClr val="FFFFFF"/>
+          </a:lnRef>
+          <a:fillRef idx="1">
+            <a:schemeClr val="accent5"/>
+          </a:fillRef>
+          <a:effectRef idx="0">
+            <a:srgbClr val="FFFFFF"/>
+          </a:effectRef>
+          <a:fontRef idx="minor">
+            <a:schemeClr val="dk1"/>
+          </a:fontRef>
+        </p:style>
+        <p:txBody>
+          <a:bodyPr rtlCol="0" anchor="ctr"/>
+          <a:p>
+            <a:pPr algn="ctr"/>
+            <a:r>
+              <a:rPr lang="zh-CN" altLang="en-US" sz="2200" b="1">
+                <a:latin typeface="微软雅黑" panose="020B0503020204020204" charset="-122"/>
+                <a:ea typeface="微软雅黑" panose="020B0503020204020204" charset="-122"/>
+              </a:rPr>
+              <a:t>编辑</a:t>
+            </a:r>
+            <a:endParaRPr lang="zh-CN" altLang="en-US" sz="2200" b="1">
+              <a:latin typeface="微软雅黑" panose="020B0503020204020204" charset="-122"/>
+              <a:ea typeface="微软雅黑" panose="020B0503020204020204" charset="-122"/>
+            </a:endParaRPr>
+          </a:p>
+        </p:txBody>
+      </p:sp>
+      <p:cxnSp>
+        <p:nvCxnSpPr>
+          <p:cNvPr id="206" name="肘形连接符 205"/>
+          <p:cNvCxnSpPr>
+            <a:stCxn id="195" idx="2"/>
+            <a:endCxn id="189" idx="0"/>
+          </p:cNvCxnSpPr>
+          <p:nvPr/>
+        </p:nvCxnSpPr>
+        <p:spPr>
+          <a:xfrm rot="5400000" flipV="1">
+            <a:off x="4130358" y="1262698"/>
+            <a:ext cx="574675" cy="3175"/>
+          </a:xfrm>
+          <a:prstGeom prst="bentConnector2">
+            <a:avLst/>
+          </a:prstGeom>
+          <a:ln w="28575" cmpd="sng">
+            <a:solidFill>
+              <a:schemeClr val="bg1">
+                <a:lumMod val="65000"/>
+              </a:schemeClr>
+            </a:solidFill>
+            <a:prstDash val="sysDot"/>
+            <a:headEnd type="none"/>
+            <a:tailEnd type="triangle"/>
+          </a:ln>
+        </p:spPr>
+        <p:style>
+          <a:lnRef idx="1">
+            <a:schemeClr val="accent1"/>
+          </a:lnRef>
+          <a:fillRef idx="0">
+            <a:schemeClr val="accent1"/>
+          </a:fillRef>
+          <a:effectRef idx="0">
+            <a:schemeClr val="accent1"/>
+          </a:effectRef>
+          <a:fontRef idx="minor">
+            <a:schemeClr val="tx1"/>
+          </a:fontRef>
+        </p:style>
+      </p:cxnSp>
+      <p:cxnSp>
+        <p:nvCxnSpPr>
+          <p:cNvPr id="209" name="曲线连接符 208"/>
+          <p:cNvCxnSpPr>
+            <a:endCxn id="205" idx="0"/>
+          </p:cNvCxnSpPr>
+          <p:nvPr/>
+        </p:nvCxnSpPr>
+        <p:spPr>
+          <a:xfrm>
+            <a:off x="4599940" y="992505"/>
+            <a:ext cx="1212850" cy="584200"/>
+          </a:xfrm>
+          <a:prstGeom prst="curvedConnector2">
+            <a:avLst/>
+          </a:prstGeom>
+          <a:ln w="28575" cmpd="sng">
+            <a:solidFill>
+              <a:schemeClr val="bg1">
+                <a:lumMod val="65000"/>
+              </a:schemeClr>
+            </a:solidFill>
+            <a:prstDash val="sysDot"/>
+            <a:headEnd type="none"/>
+            <a:tailEnd type="arrow"/>
+          </a:ln>
+        </p:spPr>
+        <p:style>
+          <a:lnRef idx="1">
+            <a:schemeClr val="accent1"/>
+          </a:lnRef>
+          <a:fillRef idx="0">
+            <a:schemeClr val="accent1"/>
+          </a:fillRef>
+          <a:effectRef idx="0">
+            <a:schemeClr val="accent1"/>
+          </a:effectRef>
+          <a:fontRef idx="minor">
+            <a:schemeClr val="tx1"/>
+          </a:fontRef>
+        </p:style>
+      </p:cxnSp>
+      <p:cxnSp>
+        <p:nvCxnSpPr>
+          <p:cNvPr id="210" name="曲线连接符 209"/>
+          <p:cNvCxnSpPr>
+            <a:endCxn id="204" idx="0"/>
+          </p:cNvCxnSpPr>
+          <p:nvPr/>
+        </p:nvCxnSpPr>
+        <p:spPr>
+          <a:xfrm>
+            <a:off x="4622165" y="983615"/>
+            <a:ext cx="2534285" cy="593090"/>
+          </a:xfrm>
+          <a:prstGeom prst="curvedConnector2">
+            <a:avLst/>
+          </a:prstGeom>
+          <a:ln w="28575" cmpd="sng">
+            <a:solidFill>
+              <a:schemeClr val="bg1">
+                <a:lumMod val="65000"/>
+              </a:schemeClr>
+            </a:solidFill>
+            <a:prstDash val="sysDot"/>
+            <a:headEnd type="none"/>
+            <a:tailEnd type="arrow"/>
+          </a:ln>
+        </p:spPr>
+        <p:style>
+          <a:lnRef idx="1">
+            <a:schemeClr val="accent1"/>
+          </a:lnRef>
+          <a:fillRef idx="0">
+            <a:schemeClr val="accent1"/>
+          </a:fillRef>
+          <a:effectRef idx="0">
+            <a:schemeClr val="accent1"/>
+          </a:effectRef>
+          <a:fontRef idx="minor">
+            <a:schemeClr val="tx1"/>
+          </a:fontRef>
+        </p:style>
+      </p:cxnSp>
+      <p:cxnSp>
+        <p:nvCxnSpPr>
+          <p:cNvPr id="211" name="曲线连接符 210"/>
+          <p:cNvCxnSpPr>
+            <a:endCxn id="203" idx="0"/>
+          </p:cNvCxnSpPr>
+          <p:nvPr/>
+        </p:nvCxnSpPr>
+        <p:spPr>
+          <a:xfrm>
+            <a:off x="4626610" y="970280"/>
+            <a:ext cx="3873500" cy="606425"/>
+          </a:xfrm>
+          <a:prstGeom prst="curvedConnector2">
+            <a:avLst/>
+          </a:prstGeom>
+          <a:ln w="28575" cmpd="sng">
+            <a:solidFill>
+              <a:schemeClr val="bg1">
+                <a:lumMod val="65000"/>
+              </a:schemeClr>
+            </a:solidFill>
+            <a:prstDash val="sysDot"/>
+            <a:headEnd type="none"/>
+            <a:tailEnd type="arrow"/>
+          </a:ln>
+        </p:spPr>
+        <p:style>
+          <a:lnRef idx="1">
+            <a:schemeClr val="accent1"/>
+          </a:lnRef>
+          <a:fillRef idx="0">
+            <a:schemeClr val="accent1"/>
+          </a:fillRef>
+          <a:effectRef idx="0">
+            <a:schemeClr val="accent1"/>
+          </a:effectRef>
+          <a:fontRef idx="minor">
+            <a:schemeClr val="tx1"/>
+          </a:fontRef>
+        </p:style>
+      </p:cxnSp>
+      <p:cxnSp>
+        <p:nvCxnSpPr>
+          <p:cNvPr id="212" name="曲线连接符 211"/>
+          <p:cNvCxnSpPr>
+            <a:endCxn id="202" idx="0"/>
+          </p:cNvCxnSpPr>
+          <p:nvPr/>
+        </p:nvCxnSpPr>
+        <p:spPr>
+          <a:xfrm rot="10800000" flipV="1">
+            <a:off x="3037840" y="996315"/>
+            <a:ext cx="1216025" cy="588645"/>
+          </a:xfrm>
+          <a:prstGeom prst="curvedConnector2">
+            <a:avLst/>
+          </a:prstGeom>
+          <a:ln w="28575" cmpd="sng">
+            <a:solidFill>
+              <a:schemeClr val="bg1">
+                <a:lumMod val="65000"/>
+              </a:schemeClr>
+            </a:solidFill>
+            <a:prstDash val="sysDot"/>
+            <a:headEnd type="none"/>
+            <a:tailEnd type="arrow"/>
+          </a:ln>
+        </p:spPr>
+        <p:style>
+          <a:lnRef idx="1">
+            <a:schemeClr val="accent1"/>
+          </a:lnRef>
+          <a:fillRef idx="0">
+            <a:schemeClr val="accent1"/>
+          </a:fillRef>
+          <a:effectRef idx="0">
+            <a:schemeClr val="accent1"/>
+          </a:effectRef>
+          <a:fontRef idx="minor">
+            <a:schemeClr val="tx1"/>
+          </a:fontRef>
+        </p:style>
+      </p:cxnSp>
+      <p:cxnSp>
+        <p:nvCxnSpPr>
+          <p:cNvPr id="213" name="曲线连接符 212"/>
+          <p:cNvCxnSpPr>
+            <a:endCxn id="201" idx="0"/>
+          </p:cNvCxnSpPr>
+          <p:nvPr/>
+        </p:nvCxnSpPr>
+        <p:spPr>
+          <a:xfrm rot="10800000" flipV="1">
+            <a:off x="1859280" y="991870"/>
+            <a:ext cx="2394585" cy="566420"/>
+          </a:xfrm>
+          <a:prstGeom prst="curvedConnector2">
+            <a:avLst/>
+          </a:prstGeom>
+          <a:ln w="28575" cmpd="sng">
+            <a:solidFill>
+              <a:schemeClr val="bg1">
+                <a:lumMod val="65000"/>
+              </a:schemeClr>
+            </a:solidFill>
+            <a:prstDash val="sysDot"/>
+            <a:headEnd type="none"/>
+            <a:tailEnd type="arrow"/>
+          </a:ln>
+        </p:spPr>
+        <p:style>
+          <a:lnRef idx="1">
+            <a:schemeClr val="accent1"/>
+          </a:lnRef>
+          <a:fillRef idx="0">
+            <a:schemeClr val="accent1"/>
+          </a:fillRef>
+          <a:effectRef idx="0">
+            <a:schemeClr val="accent1"/>
+          </a:effectRef>
+          <a:fontRef idx="minor">
+            <a:schemeClr val="tx1"/>
+          </a:fontRef>
+        </p:style>
+      </p:cxnSp>
+      <p:cxnSp>
+        <p:nvCxnSpPr>
+          <p:cNvPr id="214" name="曲线连接符 213"/>
+          <p:cNvCxnSpPr>
+            <a:endCxn id="200" idx="0"/>
+          </p:cNvCxnSpPr>
+          <p:nvPr/>
+        </p:nvCxnSpPr>
+        <p:spPr>
+          <a:xfrm rot="10800000" flipV="1">
+            <a:off x="626110" y="987425"/>
+            <a:ext cx="3641090" cy="570865"/>
+          </a:xfrm>
+          <a:prstGeom prst="curvedConnector2">
+            <a:avLst/>
+          </a:prstGeom>
+          <a:ln w="28575" cmpd="sng">
+            <a:solidFill>
+              <a:schemeClr val="bg1">
+                <a:lumMod val="65000"/>
+              </a:schemeClr>
+            </a:solidFill>
+            <a:prstDash val="sysDot"/>
+            <a:headEnd type="none"/>
+            <a:tailEnd type="arrow"/>
+          </a:ln>
+        </p:spPr>
+        <p:style>
+          <a:lnRef idx="1">
+            <a:schemeClr val="accent1"/>
+          </a:lnRef>
+          <a:fillRef idx="0">
+            <a:schemeClr val="accent1"/>
+          </a:fillRef>
+          <a:effectRef idx="0">
+            <a:schemeClr val="accent1"/>
+          </a:effectRef>
+          <a:fontRef idx="minor">
+            <a:schemeClr val="tx1"/>
+          </a:fontRef>
+        </p:style>
+      </p:cxnSp>
+      <p:sp>
+        <p:nvSpPr>
+          <p:cNvPr id="2" name="圆角矩形 1"/>
+          <p:cNvSpPr/>
+          <p:nvPr/>
+        </p:nvSpPr>
+        <p:spPr>
+          <a:xfrm>
+            <a:off x="132080" y="2322830"/>
+            <a:ext cx="987425" cy="377825"/>
+          </a:xfrm>
+          <a:prstGeom prst="roundRect">
+            <a:avLst/>
+          </a:prstGeom>
+          <a:solidFill>
+            <a:srgbClr val="A1B8E0"/>
+          </a:solidFill>
+        </p:spPr>
+        <p:style>
+          <a:lnRef idx="0">
+            <a:srgbClr val="FFFFFF"/>
+          </a:lnRef>
+          <a:fillRef idx="1">
+            <a:schemeClr val="accent5"/>
+          </a:fillRef>
+          <a:effectRef idx="0">
+            <a:srgbClr val="FFFFFF"/>
+          </a:effectRef>
+          <a:fontRef idx="minor">
+            <a:schemeClr val="dk1"/>
+          </a:fontRef>
+        </p:style>
+        <p:txBody>
+          <a:bodyPr rtlCol="0" anchor="ctr"/>
+          <a:p>
+            <a:pPr algn="ctr"/>
+            <a:r>
+              <a:rPr lang="zh-CN" altLang="en-US" sz="1200" b="1">
+                <a:latin typeface="微软雅黑" panose="020B0503020204020204" charset="-122"/>
+                <a:ea typeface="微软雅黑" panose="020B0503020204020204" charset="-122"/>
+              </a:rPr>
+              <a:t>委员会</a:t>
+            </a:r>
+            <a:endParaRPr lang="zh-CN" altLang="en-US" sz="1200" b="1">
+              <a:latin typeface="微软雅黑" panose="020B0503020204020204" charset="-122"/>
+              <a:ea typeface="微软雅黑" panose="020B0503020204020204" charset="-122"/>
+            </a:endParaRPr>
+          </a:p>
+        </p:txBody>
+      </p:sp>
+      <p:sp>
+        <p:nvSpPr>
+          <p:cNvPr id="3" name="圆角矩形 2"/>
+          <p:cNvSpPr/>
+          <p:nvPr/>
+        </p:nvSpPr>
+        <p:spPr>
+          <a:xfrm>
+            <a:off x="132080" y="2875915"/>
+            <a:ext cx="987425" cy="377825"/>
+          </a:xfrm>
+          <a:prstGeom prst="roundRect">
+            <a:avLst/>
+          </a:prstGeom>
+          <a:solidFill>
+            <a:srgbClr val="A1B8E0"/>
+          </a:solidFill>
+        </p:spPr>
+        <p:style>
+          <a:lnRef idx="0">
+            <a:srgbClr val="FFFFFF"/>
+          </a:lnRef>
+          <a:fillRef idx="1">
+            <a:schemeClr val="accent5"/>
+          </a:fillRef>
+          <a:effectRef idx="0">
+            <a:srgbClr val="FFFFFF"/>
+          </a:effectRef>
+          <a:fontRef idx="minor">
+            <a:schemeClr val="dk1"/>
+          </a:fontRef>
+        </p:style>
+        <p:txBody>
+          <a:bodyPr rtlCol="0" anchor="ctr"/>
+          <a:p>
+            <a:pPr algn="ctr"/>
+            <a:r>
+              <a:rPr lang="zh-CN" altLang="en-US" sz="1200" b="1">
+                <a:latin typeface="微软雅黑" panose="020B0503020204020204" charset="-122"/>
+                <a:ea typeface="微软雅黑" panose="020B0503020204020204" charset="-122"/>
+              </a:rPr>
+              <a:t>引进成员</a:t>
+            </a:r>
+            <a:endParaRPr lang="zh-CN" altLang="en-US" sz="1200" b="1">
+              <a:latin typeface="微软雅黑" panose="020B0503020204020204" charset="-122"/>
+              <a:ea typeface="微软雅黑" panose="020B0503020204020204" charset="-122"/>
+            </a:endParaRPr>
+          </a:p>
+        </p:txBody>
+      </p:sp>
+      <p:sp>
+        <p:nvSpPr>
+          <p:cNvPr id="4" name="圆角矩形 3"/>
+          <p:cNvSpPr/>
+          <p:nvPr/>
+        </p:nvSpPr>
+        <p:spPr>
+          <a:xfrm>
+            <a:off x="1344295" y="2322830"/>
+            <a:ext cx="1029335" cy="377825"/>
+          </a:xfrm>
+          <a:prstGeom prst="roundRect">
+            <a:avLst/>
+          </a:prstGeom>
+          <a:solidFill>
+            <a:srgbClr val="A1B8E0"/>
+          </a:solidFill>
+        </p:spPr>
+        <p:style>
+          <a:lnRef idx="0">
+            <a:srgbClr val="FFFFFF"/>
+          </a:lnRef>
+          <a:fillRef idx="1">
+            <a:schemeClr val="accent5"/>
+          </a:fillRef>
+          <a:effectRef idx="0">
+            <a:srgbClr val="FFFFFF"/>
+          </a:effectRef>
+          <a:fontRef idx="minor">
+            <a:schemeClr val="dk1"/>
+          </a:fontRef>
+        </p:style>
+        <p:txBody>
+          <a:bodyPr rtlCol="0" anchor="ctr"/>
+          <a:p>
+            <a:pPr algn="ctr"/>
+            <a:r>
+              <a:rPr lang="zh-CN" altLang="en-US" sz="1200" b="1">
+                <a:latin typeface="微软雅黑" panose="020B0503020204020204" charset="-122"/>
+                <a:ea typeface="微软雅黑" panose="020B0503020204020204" charset="-122"/>
+              </a:rPr>
+              <a:t>支出记录</a:t>
+            </a:r>
+            <a:endParaRPr lang="zh-CN" altLang="en-US" sz="1200" b="1">
+              <a:latin typeface="微软雅黑" panose="020B0503020204020204" charset="-122"/>
+              <a:ea typeface="微软雅黑" panose="020B0503020204020204" charset="-122"/>
+            </a:endParaRPr>
+          </a:p>
+        </p:txBody>
+      </p:sp>
+      <p:sp>
+        <p:nvSpPr>
+          <p:cNvPr id="5" name="圆角矩形 4"/>
+          <p:cNvSpPr/>
+          <p:nvPr/>
+        </p:nvSpPr>
+        <p:spPr>
+          <a:xfrm>
+            <a:off x="1344295" y="2875915"/>
+            <a:ext cx="1029335" cy="377825"/>
+          </a:xfrm>
+          <a:prstGeom prst="roundRect">
+            <a:avLst/>
+          </a:prstGeom>
+          <a:solidFill>
+            <a:srgbClr val="A1B8E0"/>
+          </a:solidFill>
+        </p:spPr>
+        <p:style>
+          <a:lnRef idx="0">
+            <a:srgbClr val="FFFFFF"/>
+          </a:lnRef>
+          <a:fillRef idx="1">
+            <a:schemeClr val="accent5"/>
+          </a:fillRef>
+          <a:effectRef idx="0">
+            <a:srgbClr val="FFFFFF"/>
+          </a:effectRef>
+          <a:fontRef idx="minor">
+            <a:schemeClr val="dk1"/>
+          </a:fontRef>
+        </p:style>
+        <p:txBody>
+          <a:bodyPr rtlCol="0" anchor="ctr"/>
+          <a:p>
+            <a:pPr algn="ctr"/>
+            <a:r>
+              <a:rPr lang="zh-CN" altLang="en-US" sz="1200" b="1">
+                <a:latin typeface="微软雅黑" panose="020B0503020204020204" charset="-122"/>
+                <a:ea typeface="微软雅黑" panose="020B0503020204020204" charset="-122"/>
+              </a:rPr>
+              <a:t>支出报销</a:t>
+            </a:r>
+            <a:endParaRPr lang="zh-CN" altLang="en-US" sz="1200" b="1">
+              <a:latin typeface="微软雅黑" panose="020B0503020204020204" charset="-122"/>
+              <a:ea typeface="微软雅黑" panose="020B0503020204020204" charset="-122"/>
+            </a:endParaRPr>
+          </a:p>
+        </p:txBody>
+      </p:sp>
+      <p:sp>
+        <p:nvSpPr>
+          <p:cNvPr id="6" name="圆角矩形 5"/>
+          <p:cNvSpPr/>
+          <p:nvPr/>
+        </p:nvSpPr>
+        <p:spPr>
+          <a:xfrm>
+            <a:off x="5261610" y="3327400"/>
+            <a:ext cx="1058545" cy="365760"/>
+          </a:xfrm>
+          <a:prstGeom prst="roundRect">
+            <a:avLst/>
+          </a:prstGeom>
+          <a:solidFill>
+            <a:srgbClr val="A1B8E0"/>
+          </a:solidFill>
+        </p:spPr>
+        <p:style>
+          <a:lnRef idx="0">
+            <a:srgbClr val="FFFFFF"/>
+          </a:lnRef>
+          <a:fillRef idx="1">
+            <a:schemeClr val="accent5"/>
+          </a:fillRef>
+          <a:effectRef idx="0">
+            <a:srgbClr val="FFFFFF"/>
+          </a:effectRef>
+          <a:fontRef idx="minor">
+            <a:schemeClr val="dk1"/>
+          </a:fontRef>
+        </p:style>
+        <p:txBody>
+          <a:bodyPr rtlCol="0" anchor="ctr"/>
+          <a:p>
+            <a:pPr algn="ctr"/>
+            <a:r>
+              <a:rPr lang="zh-CN" altLang="en-US" sz="1200" b="1">
+                <a:latin typeface="微软雅黑" panose="020B0503020204020204" charset="-122"/>
+                <a:ea typeface="微软雅黑" panose="020B0503020204020204" charset="-122"/>
+              </a:rPr>
+              <a:t>文案排版</a:t>
+            </a:r>
+            <a:endParaRPr lang="zh-CN" altLang="en-US" sz="1200" b="1">
+              <a:latin typeface="微软雅黑" panose="020B0503020204020204" charset="-122"/>
+              <a:ea typeface="微软雅黑" panose="020B0503020204020204" charset="-122"/>
+            </a:endParaRPr>
+          </a:p>
+        </p:txBody>
+      </p:sp>
+      <p:sp>
+        <p:nvSpPr>
+          <p:cNvPr id="8" name="圆角矩形 7"/>
+          <p:cNvSpPr/>
+          <p:nvPr/>
+        </p:nvSpPr>
+        <p:spPr>
+          <a:xfrm>
+            <a:off x="5277485" y="3773805"/>
+            <a:ext cx="1058545" cy="351790"/>
+          </a:xfrm>
+          <a:prstGeom prst="roundRect">
+            <a:avLst/>
+          </a:prstGeom>
+          <a:solidFill>
+            <a:srgbClr val="A1B8E0"/>
+          </a:solidFill>
+        </p:spPr>
+        <p:style>
+          <a:lnRef idx="0">
+            <a:srgbClr val="FFFFFF"/>
+          </a:lnRef>
+          <a:fillRef idx="1">
+            <a:schemeClr val="accent5"/>
+          </a:fillRef>
+          <a:effectRef idx="0">
+            <a:srgbClr val="FFFFFF"/>
+          </a:effectRef>
+          <a:fontRef idx="minor">
+            <a:schemeClr val="dk1"/>
+          </a:fontRef>
+        </p:style>
+        <p:txBody>
+          <a:bodyPr rtlCol="0" anchor="ctr"/>
+          <a:p>
+            <a:pPr algn="ctr"/>
+            <a:r>
+              <a:rPr lang="zh-CN" altLang="en-US" sz="1200" b="1">
+                <a:latin typeface="微软雅黑" panose="020B0503020204020204" charset="-122"/>
+                <a:ea typeface="微软雅黑" panose="020B0503020204020204" charset="-122"/>
+              </a:rPr>
+              <a:t>稿件审核</a:t>
+            </a:r>
+            <a:endParaRPr lang="zh-CN" altLang="en-US" sz="1200" b="1">
+              <a:latin typeface="微软雅黑" panose="020B0503020204020204" charset="-122"/>
+              <a:ea typeface="微软雅黑" panose="020B0503020204020204" charset="-122"/>
+            </a:endParaRPr>
+          </a:p>
+        </p:txBody>
+      </p:sp>
+      <p:sp>
+        <p:nvSpPr>
+          <p:cNvPr id="9" name="圆角矩形 8"/>
+          <p:cNvSpPr/>
+          <p:nvPr/>
+        </p:nvSpPr>
+        <p:spPr>
+          <a:xfrm>
+            <a:off x="132080" y="3429000"/>
+            <a:ext cx="1050290" cy="414020"/>
+          </a:xfrm>
+          <a:prstGeom prst="roundRect">
+            <a:avLst/>
+          </a:prstGeom>
+          <a:solidFill>
+            <a:srgbClr val="A1B8E0"/>
+          </a:solidFill>
+        </p:spPr>
+        <p:style>
+          <a:lnRef idx="0">
+            <a:srgbClr val="FFFFFF"/>
+          </a:lnRef>
+          <a:fillRef idx="1">
+            <a:schemeClr val="accent5"/>
+          </a:fillRef>
+          <a:effectRef idx="0">
+            <a:srgbClr val="FFFFFF"/>
+          </a:effectRef>
+          <a:fontRef idx="minor">
+            <a:schemeClr val="dk1"/>
+          </a:fontRef>
+        </p:style>
+        <p:txBody>
+          <a:bodyPr rtlCol="0" anchor="ctr"/>
+          <a:p>
+            <a:pPr algn="ctr"/>
+            <a:r>
+              <a:rPr lang="zh-CN" altLang="en-US" sz="1200" b="1">
+                <a:latin typeface="微软雅黑" panose="020B0503020204020204" charset="-122"/>
+                <a:ea typeface="微软雅黑" panose="020B0503020204020204" charset="-122"/>
+              </a:rPr>
+              <a:t>成员信息</a:t>
+            </a:r>
+            <a:endParaRPr lang="zh-CN" altLang="en-US" sz="1200" b="1">
+              <a:latin typeface="微软雅黑" panose="020B0503020204020204" charset="-122"/>
+              <a:ea typeface="微软雅黑" panose="020B0503020204020204" charset="-122"/>
+            </a:endParaRPr>
+          </a:p>
+          <a:p>
+            <a:pPr algn="ctr"/>
+            <a:r>
+              <a:rPr lang="zh-CN" altLang="en-US" sz="1200" b="1">
+                <a:latin typeface="微软雅黑" panose="020B0503020204020204" charset="-122"/>
+                <a:ea typeface="微软雅黑" panose="020B0503020204020204" charset="-122"/>
+              </a:rPr>
+              <a:t>维护</a:t>
+            </a:r>
+            <a:endParaRPr lang="zh-CN" altLang="en-US" sz="1200" b="1">
+              <a:latin typeface="微软雅黑" panose="020B0503020204020204" charset="-122"/>
+              <a:ea typeface="微软雅黑" panose="020B0503020204020204" charset="-122"/>
+            </a:endParaRPr>
+          </a:p>
+        </p:txBody>
+      </p:sp>
+      <p:sp>
+        <p:nvSpPr>
+          <p:cNvPr id="10" name="圆角矩形 9"/>
+          <p:cNvSpPr/>
+          <p:nvPr/>
+        </p:nvSpPr>
+        <p:spPr>
+          <a:xfrm>
+            <a:off x="132080" y="3982085"/>
+            <a:ext cx="1050290" cy="318770"/>
+          </a:xfrm>
+          <a:prstGeom prst="roundRect">
+            <a:avLst/>
+          </a:prstGeom>
+          <a:solidFill>
+            <a:srgbClr val="A1B8E0"/>
+          </a:solidFill>
+        </p:spPr>
+        <p:style>
+          <a:lnRef idx="0">
+            <a:srgbClr val="FFFFFF"/>
+          </a:lnRef>
+          <a:fillRef idx="1">
+            <a:schemeClr val="accent5"/>
+          </a:fillRef>
+          <a:effectRef idx="0">
+            <a:srgbClr val="FFFFFF"/>
+          </a:effectRef>
+          <a:fontRef idx="minor">
+            <a:schemeClr val="dk1"/>
+          </a:fontRef>
+        </p:style>
+        <p:txBody>
+          <a:bodyPr rtlCol="0" anchor="ctr"/>
+          <a:p>
+            <a:pPr algn="ctr"/>
+            <a:r>
+              <a:rPr lang="zh-CN" altLang="en-US" sz="1200" b="1">
+                <a:latin typeface="微软雅黑" panose="020B0503020204020204" charset="-122"/>
+                <a:ea typeface="微软雅黑" panose="020B0503020204020204" charset="-122"/>
+              </a:rPr>
+              <a:t>贡献度统计</a:t>
+            </a:r>
+            <a:endParaRPr lang="zh-CN" altLang="en-US" sz="1200" b="1">
+              <a:latin typeface="微软雅黑" panose="020B0503020204020204" charset="-122"/>
+              <a:ea typeface="微软雅黑" panose="020B0503020204020204" charset="-122"/>
+            </a:endParaRPr>
+          </a:p>
+        </p:txBody>
+      </p:sp>
+      <p:sp>
+        <p:nvSpPr>
+          <p:cNvPr id="11" name="圆角矩形 10"/>
+          <p:cNvSpPr/>
+          <p:nvPr/>
+        </p:nvSpPr>
+        <p:spPr>
+          <a:xfrm>
+            <a:off x="2497455" y="2875280"/>
+            <a:ext cx="1069340" cy="389890"/>
+          </a:xfrm>
+          <a:prstGeom prst="roundRect">
+            <a:avLst/>
+          </a:prstGeom>
+          <a:solidFill>
+            <a:srgbClr val="A1B8E0"/>
+          </a:solidFill>
+        </p:spPr>
+        <p:style>
+          <a:lnRef idx="0">
+            <a:srgbClr val="FFFFFF"/>
+          </a:lnRef>
+          <a:fillRef idx="1">
+            <a:schemeClr val="accent5"/>
+          </a:fillRef>
+          <a:effectRef idx="0">
+            <a:srgbClr val="FFFFFF"/>
+          </a:effectRef>
+          <a:fontRef idx="minor">
+            <a:schemeClr val="dk1"/>
+          </a:fontRef>
+        </p:style>
+        <p:txBody>
+          <a:bodyPr rtlCol="0" anchor="ctr"/>
+          <a:p>
+            <a:pPr algn="ctr"/>
+            <a:r>
+              <a:rPr lang="zh-CN" altLang="en-US" sz="1200" b="1">
+                <a:latin typeface="微软雅黑" panose="020B0503020204020204" charset="-122"/>
+                <a:ea typeface="微软雅黑" panose="020B0503020204020204" charset="-122"/>
+              </a:rPr>
+              <a:t>内部通讯</a:t>
+            </a:r>
+            <a:endParaRPr lang="zh-CN" altLang="en-US" sz="1200" b="1">
+              <a:latin typeface="微软雅黑" panose="020B0503020204020204" charset="-122"/>
+              <a:ea typeface="微软雅黑" panose="020B0503020204020204" charset="-122"/>
+            </a:endParaRPr>
+          </a:p>
+        </p:txBody>
+      </p:sp>
+      <p:sp>
+        <p:nvSpPr>
+          <p:cNvPr id="12" name="圆角矩形 11"/>
+          <p:cNvSpPr/>
+          <p:nvPr/>
+        </p:nvSpPr>
+        <p:spPr>
+          <a:xfrm>
+            <a:off x="3888105" y="2322830"/>
+            <a:ext cx="1058545" cy="381000"/>
+          </a:xfrm>
+          <a:prstGeom prst="roundRect">
+            <a:avLst/>
+          </a:prstGeom>
+          <a:solidFill>
+            <a:srgbClr val="A1B8E0"/>
+          </a:solidFill>
+        </p:spPr>
+        <p:style>
+          <a:lnRef idx="0">
+            <a:srgbClr val="FFFFFF"/>
+          </a:lnRef>
+          <a:fillRef idx="1">
+            <a:schemeClr val="accent5"/>
+          </a:fillRef>
+          <a:effectRef idx="0">
+            <a:srgbClr val="FFFFFF"/>
+          </a:effectRef>
+          <a:fontRef idx="minor">
+            <a:schemeClr val="dk1"/>
+          </a:fontRef>
+        </p:style>
+        <p:txBody>
+          <a:bodyPr rtlCol="0" anchor="ctr"/>
+          <a:p>
+            <a:pPr algn="ctr"/>
+            <a:r>
+              <a:rPr lang="zh-CN" altLang="en-US" sz="1200" b="1">
+                <a:latin typeface="微软雅黑" panose="020B0503020204020204" charset="-122"/>
+                <a:ea typeface="微软雅黑" panose="020B0503020204020204" charset="-122"/>
+              </a:rPr>
+              <a:t>运维组</a:t>
+            </a:r>
+            <a:endParaRPr lang="zh-CN" altLang="en-US" sz="1200" b="1">
+              <a:latin typeface="微软雅黑" panose="020B0503020204020204" charset="-122"/>
+              <a:ea typeface="微软雅黑" panose="020B0503020204020204" charset="-122"/>
+            </a:endParaRPr>
+          </a:p>
+        </p:txBody>
+      </p:sp>
+      <p:sp>
+        <p:nvSpPr>
+          <p:cNvPr id="14" name="圆角矩形 13"/>
+          <p:cNvSpPr/>
+          <p:nvPr/>
+        </p:nvSpPr>
+        <p:spPr>
+          <a:xfrm>
+            <a:off x="3888105" y="3296920"/>
+            <a:ext cx="1058545" cy="328930"/>
+          </a:xfrm>
+          <a:prstGeom prst="roundRect">
+            <a:avLst/>
+          </a:prstGeom>
+          <a:solidFill>
+            <a:srgbClr val="A1B8E0"/>
+          </a:solidFill>
+        </p:spPr>
+        <p:style>
+          <a:lnRef idx="0">
+            <a:srgbClr val="FFFFFF"/>
+          </a:lnRef>
+          <a:fillRef idx="1">
+            <a:schemeClr val="accent5"/>
+          </a:fillRef>
+          <a:effectRef idx="0">
+            <a:srgbClr val="FFFFFF"/>
+          </a:effectRef>
+          <a:fontRef idx="minor">
+            <a:schemeClr val="dk1"/>
+          </a:fontRef>
+        </p:style>
+        <p:txBody>
+          <a:bodyPr rtlCol="0" anchor="ctr"/>
+          <a:p>
+            <a:pPr algn="ctr"/>
+            <a:r>
+              <a:rPr lang="zh-CN" altLang="en-US" sz="1200" b="1">
+                <a:latin typeface="微软雅黑" panose="020B0503020204020204" charset="-122"/>
+                <a:ea typeface="微软雅黑" panose="020B0503020204020204" charset="-122"/>
+              </a:rPr>
+              <a:t>应用开发组</a:t>
+            </a:r>
+            <a:endParaRPr lang="zh-CN" altLang="en-US" sz="1200" b="1">
+              <a:latin typeface="微软雅黑" panose="020B0503020204020204" charset="-122"/>
+              <a:ea typeface="微软雅黑" panose="020B0503020204020204" charset="-122"/>
+            </a:endParaRPr>
+          </a:p>
+        </p:txBody>
+      </p:sp>
+      <p:sp>
+        <p:nvSpPr>
+          <p:cNvPr id="15" name="圆角矩形 14"/>
+          <p:cNvSpPr/>
+          <p:nvPr/>
+        </p:nvSpPr>
+        <p:spPr>
+          <a:xfrm>
+            <a:off x="3888105" y="2853690"/>
+            <a:ext cx="1058545" cy="328930"/>
+          </a:xfrm>
+          <a:prstGeom prst="roundRect">
+            <a:avLst/>
+          </a:prstGeom>
+          <a:solidFill>
+            <a:srgbClr val="A1B8E0"/>
+          </a:solidFill>
+        </p:spPr>
+        <p:style>
+          <a:lnRef idx="0">
+            <a:srgbClr val="FFFFFF"/>
+          </a:lnRef>
+          <a:fillRef idx="1">
+            <a:schemeClr val="accent5"/>
+          </a:fillRef>
+          <a:effectRef idx="0">
+            <a:srgbClr val="FFFFFF"/>
+          </a:effectRef>
+          <a:fontRef idx="minor">
+            <a:schemeClr val="dk1"/>
+          </a:fontRef>
+        </p:style>
+        <p:txBody>
+          <a:bodyPr rtlCol="0" anchor="ctr"/>
+          <a:p>
+            <a:pPr algn="ctr"/>
+            <a:r>
+              <a:rPr lang="zh-CN" altLang="en-US" sz="1200" b="1">
+                <a:latin typeface="微软雅黑" panose="020B0503020204020204" charset="-122"/>
+                <a:ea typeface="微软雅黑" panose="020B0503020204020204" charset="-122"/>
+              </a:rPr>
+              <a:t>大模型组</a:t>
+            </a:r>
+            <a:endParaRPr lang="zh-CN" altLang="en-US" sz="1200" b="1">
+              <a:latin typeface="微软雅黑" panose="020B0503020204020204" charset="-122"/>
+              <a:ea typeface="微软雅黑" panose="020B0503020204020204" charset="-122"/>
+            </a:endParaRPr>
+          </a:p>
+        </p:txBody>
+      </p:sp>
+      <p:sp>
+        <p:nvSpPr>
+          <p:cNvPr id="16" name="圆角矩形 15"/>
+          <p:cNvSpPr/>
+          <p:nvPr/>
+        </p:nvSpPr>
+        <p:spPr>
+          <a:xfrm>
+            <a:off x="3888105" y="3790315"/>
+            <a:ext cx="1058545" cy="328930"/>
+          </a:xfrm>
+          <a:prstGeom prst="roundRect">
+            <a:avLst/>
+          </a:prstGeom>
+          <a:solidFill>
+            <a:srgbClr val="A1B8E0"/>
+          </a:solidFill>
+        </p:spPr>
+        <p:style>
+          <a:lnRef idx="0">
+            <a:srgbClr val="FFFFFF"/>
+          </a:lnRef>
+          <a:fillRef idx="1">
+            <a:schemeClr val="accent5"/>
+          </a:fillRef>
+          <a:effectRef idx="0">
+            <a:srgbClr val="FFFFFF"/>
+          </a:effectRef>
+          <a:fontRef idx="minor">
+            <a:schemeClr val="dk1"/>
+          </a:fontRef>
+        </p:style>
+        <p:txBody>
+          <a:bodyPr rtlCol="0" anchor="ctr"/>
+          <a:p>
+            <a:pPr algn="ctr"/>
+            <a:r>
+              <a:rPr lang="zh-CN" altLang="en-US" sz="1200" b="1">
+                <a:latin typeface="微软雅黑" panose="020B0503020204020204" charset="-122"/>
+                <a:ea typeface="微软雅黑" panose="020B0503020204020204" charset="-122"/>
+              </a:rPr>
+              <a:t>插件组</a:t>
+            </a:r>
+            <a:endParaRPr lang="zh-CN" altLang="en-US" sz="1200" b="1">
+              <a:latin typeface="微软雅黑" panose="020B0503020204020204" charset="-122"/>
+              <a:ea typeface="微软雅黑" panose="020B0503020204020204" charset="-122"/>
+            </a:endParaRPr>
+          </a:p>
+        </p:txBody>
+      </p:sp>
+      <p:sp>
+        <p:nvSpPr>
+          <p:cNvPr id="17" name="圆角矩形 16"/>
+          <p:cNvSpPr/>
+          <p:nvPr/>
+        </p:nvSpPr>
+        <p:spPr>
+          <a:xfrm>
+            <a:off x="3888105" y="4726940"/>
+            <a:ext cx="1058545" cy="328930"/>
+          </a:xfrm>
+          <a:prstGeom prst="roundRect">
+            <a:avLst/>
+          </a:prstGeom>
+          <a:solidFill>
+            <a:srgbClr val="A1B8E0"/>
+          </a:solidFill>
+        </p:spPr>
+        <p:style>
+          <a:lnRef idx="0">
+            <a:srgbClr val="FFFFFF"/>
+          </a:lnRef>
+          <a:fillRef idx="1">
+            <a:schemeClr val="accent5"/>
+          </a:fillRef>
+          <a:effectRef idx="0">
+            <a:srgbClr val="FFFFFF"/>
+          </a:effectRef>
+          <a:fontRef idx="minor">
+            <a:schemeClr val="dk1"/>
+          </a:fontRef>
+        </p:style>
+        <p:txBody>
+          <a:bodyPr rtlCol="0" anchor="ctr"/>
+          <a:p>
+            <a:pPr algn="ctr"/>
+            <a:r>
+              <a:rPr lang="zh-CN" altLang="en-US" sz="1200" b="1">
+                <a:latin typeface="微软雅黑" panose="020B0503020204020204" charset="-122"/>
+                <a:ea typeface="微软雅黑" panose="020B0503020204020204" charset="-122"/>
+              </a:rPr>
+              <a:t>引擎组</a:t>
+            </a:r>
+            <a:endParaRPr lang="zh-CN" altLang="en-US" sz="1200" b="1">
+              <a:latin typeface="微软雅黑" panose="020B0503020204020204" charset="-122"/>
+              <a:ea typeface="微软雅黑" panose="020B0503020204020204" charset="-122"/>
+            </a:endParaRPr>
+          </a:p>
+        </p:txBody>
+      </p:sp>
+      <p:sp>
+        <p:nvSpPr>
+          <p:cNvPr id="18" name="圆角矩形 17"/>
+          <p:cNvSpPr/>
+          <p:nvPr/>
+        </p:nvSpPr>
+        <p:spPr>
+          <a:xfrm>
+            <a:off x="3888105" y="4283710"/>
+            <a:ext cx="1058545" cy="328930"/>
+          </a:xfrm>
+          <a:prstGeom prst="roundRect">
+            <a:avLst/>
+          </a:prstGeom>
+          <a:solidFill>
+            <a:srgbClr val="A1B8E0"/>
+          </a:solidFill>
+        </p:spPr>
+        <p:style>
+          <a:lnRef idx="0">
+            <a:srgbClr val="FFFFFF"/>
+          </a:lnRef>
+          <a:fillRef idx="1">
+            <a:schemeClr val="accent5"/>
+          </a:fillRef>
+          <a:effectRef idx="0">
+            <a:srgbClr val="FFFFFF"/>
+          </a:effectRef>
+          <a:fontRef idx="minor">
+            <a:schemeClr val="dk1"/>
+          </a:fontRef>
+        </p:style>
+        <p:txBody>
+          <a:bodyPr rtlCol="0" anchor="ctr"/>
+          <a:p>
+            <a:pPr algn="ctr"/>
+            <a:r>
+              <a:rPr lang="zh-CN" altLang="en-US" sz="1200" b="1">
+                <a:latin typeface="微软雅黑" panose="020B0503020204020204" charset="-122"/>
+                <a:ea typeface="微软雅黑" panose="020B0503020204020204" charset="-122"/>
+              </a:rPr>
+              <a:t>艺术组</a:t>
+            </a:r>
+            <a:endParaRPr lang="zh-CN" altLang="en-US" sz="1200" b="1">
+              <a:latin typeface="微软雅黑" panose="020B0503020204020204" charset="-122"/>
+              <a:ea typeface="微软雅黑" panose="020B0503020204020204" charset="-122"/>
+            </a:endParaRPr>
+          </a:p>
+        </p:txBody>
+      </p:sp>
+      <p:sp>
+        <p:nvSpPr>
+          <p:cNvPr id="19" name="圆角矩形 18"/>
+          <p:cNvSpPr/>
+          <p:nvPr/>
+        </p:nvSpPr>
+        <p:spPr>
+          <a:xfrm>
+            <a:off x="5261610" y="2338705"/>
+            <a:ext cx="1058545" cy="365760"/>
+          </a:xfrm>
+          <a:prstGeom prst="roundRect">
+            <a:avLst/>
+          </a:prstGeom>
+          <a:solidFill>
+            <a:srgbClr val="A1B8E0"/>
+          </a:solidFill>
+        </p:spPr>
+        <p:style>
+          <a:lnRef idx="0">
+            <a:srgbClr val="FFFFFF"/>
+          </a:lnRef>
+          <a:fillRef idx="1">
+            <a:schemeClr val="accent5"/>
+          </a:fillRef>
+          <a:effectRef idx="0">
+            <a:srgbClr val="FFFFFF"/>
+          </a:effectRef>
+          <a:fontRef idx="minor">
+            <a:schemeClr val="dk1"/>
+          </a:fontRef>
+        </p:style>
+        <p:txBody>
+          <a:bodyPr rtlCol="0" anchor="ctr"/>
+          <a:p>
+            <a:pPr algn="ctr"/>
+            <a:r>
+              <a:rPr lang="zh-CN" altLang="en-US" sz="1200" b="1">
+                <a:latin typeface="微软雅黑" panose="020B0503020204020204" charset="-122"/>
+                <a:ea typeface="微软雅黑" panose="020B0503020204020204" charset="-122"/>
+              </a:rPr>
+              <a:t>文档撰写</a:t>
+            </a:r>
+            <a:endParaRPr lang="zh-CN" altLang="en-US" sz="1200" b="1">
+              <a:latin typeface="微软雅黑" panose="020B0503020204020204" charset="-122"/>
+              <a:ea typeface="微软雅黑" panose="020B0503020204020204" charset="-122"/>
+            </a:endParaRPr>
+          </a:p>
+        </p:txBody>
+      </p:sp>
+      <p:sp>
+        <p:nvSpPr>
+          <p:cNvPr id="20" name="圆角矩形 19"/>
+          <p:cNvSpPr/>
+          <p:nvPr/>
+        </p:nvSpPr>
+        <p:spPr>
+          <a:xfrm>
+            <a:off x="5261610" y="2851150"/>
+            <a:ext cx="1058545" cy="377825"/>
+          </a:xfrm>
+          <a:prstGeom prst="roundRect">
+            <a:avLst/>
+          </a:prstGeom>
+          <a:solidFill>
+            <a:srgbClr val="A1B8E0"/>
+          </a:solidFill>
+        </p:spPr>
+        <p:style>
+          <a:lnRef idx="0">
+            <a:srgbClr val="FFFFFF"/>
+          </a:lnRef>
+          <a:fillRef idx="1">
+            <a:schemeClr val="accent5"/>
+          </a:fillRef>
+          <a:effectRef idx="0">
+            <a:srgbClr val="FFFFFF"/>
+          </a:effectRef>
+          <a:fontRef idx="minor">
+            <a:schemeClr val="dk1"/>
+          </a:fontRef>
+        </p:style>
+        <p:txBody>
+          <a:bodyPr rtlCol="0" anchor="ctr"/>
+          <a:p>
+            <a:pPr algn="ctr"/>
+            <a:r>
+              <a:rPr lang="zh-CN" altLang="en-US" sz="1200" b="1">
+                <a:latin typeface="微软雅黑" panose="020B0503020204020204" charset="-122"/>
+                <a:ea typeface="微软雅黑" panose="020B0503020204020204" charset="-122"/>
+              </a:rPr>
+              <a:t>截图录屏</a:t>
+            </a:r>
+            <a:endParaRPr lang="zh-CN" altLang="en-US" sz="1200" b="1">
+              <a:latin typeface="微软雅黑" panose="020B0503020204020204" charset="-122"/>
+              <a:ea typeface="微软雅黑" panose="020B0503020204020204" charset="-122"/>
+            </a:endParaRPr>
+          </a:p>
+        </p:txBody>
+      </p:sp>
+    </p:spTree>
+  </p:cSld>
+  <p:clrMapOvr>
+    <a:masterClrMapping/>
+  </p:clrMapOvr>
+</p:sld>
+</file>
+
 <file path=ppt/theme/theme1.xml><?xml version="1.0" encoding="utf-8"?>
 <a:theme xmlns:a="http://schemas.openxmlformats.org/drawingml/2006/main" name="Luxe">
   <a:themeElements>
@@ -12701,12 +14849,46 @@
     </a:fmtScheme>
   </a:themeElements>
   <a:objectDefaults>
+    <a:spDef>
+      <a:spPr>
+        <a:ln w="28575" cmpd="sng">
+          <a:solidFill>
+            <a:schemeClr val="bg1">
+              <a:lumMod val="65000"/>
+            </a:schemeClr>
+          </a:solidFill>
+          <a:prstDash val="sysDot"/>
+          <a:headEnd type="none"/>
+          <a:tailEnd type="arrow"/>
+        </a:ln>
+      </a:spPr>
+      <a:bodyPr/>
+      <a:lstStyle/>
+      <a:style>
+        <a:lnRef idx="1">
+          <a:schemeClr val="accent1"/>
+        </a:lnRef>
+        <a:fillRef idx="0">
+          <a:schemeClr val="accent1"/>
+        </a:fillRef>
+        <a:effectRef idx="0">
+          <a:schemeClr val="accent1"/>
+        </a:effectRef>
+        <a:fontRef idx="minor">
+          <a:schemeClr val="tx1"/>
+        </a:fontRef>
+      </a:style>
+    </a:spDef>
     <a:lnDef>
       <a:spPr>
-        <a:ln w="19050">
+        <a:ln w="28575" cmpd="sng">
           <a:solidFill>
-            <a:schemeClr val="accent3"/>
+            <a:schemeClr val="bg1">
+              <a:lumMod val="65000"/>
+            </a:schemeClr>
           </a:solidFill>
+          <a:prstDash val="sysDot"/>
+          <a:headEnd type="triangle"/>
           <a:tailEnd type="triangle"/>
         </a:ln>
       </a:spPr>
